--- a/docs/교재/통합반/07일차/통합반_07일차.pptx
+++ b/docs/교재/통합반/07일차/통합반_07일차.pptx
@@ -3498,7 +3498,7 @@
           <a:lstStyle/>
           <a:p>
             <a:r>
-              <a:t>두 결정이 무엇을 남기는지를 견줍니다. 쿨러 사건에서는 운전원이 승인했고, 그 순간 시스템이 유온과 운전 모드를 다시 확인한 다음 팬 속도 명령을 만들었습니다. 거절은 사유를 적어야 받아들여지며, 설비 명령도 업무 처리도 만들어지지 않습니다. 결과 보고에는 누가 왜 거절했는지와 명령을 내지 않았다는 사실이 남습니다.</a:t>
+              <a:t>두 결정이 무엇을 남기는지를 견줍니다. 처리 건은 경보 하나가 열어 끝날 때까지 이어지는 업무 한 건을 가리킵니다. 쿨러 사건에서는 운전원이 승인했고, 그 순간 시스템이 유온과 운전 모드를 다시 확인한 다음 팬 속도 명령을 만들었습니다. 거절은 사유를 적어야 받아들여지며, 설비 명령도 업무 처리도 만들어지지 않습니다. 결과 보고에는 누가 왜 거절했는지와 명령을 내지 않았다는 사실이 남습니다.</a:t>
             </a:r>
           </a:p>
         </p:txBody>
@@ -8376,7 +8376,7 @@
       </p:sp>
       <p:pic>
         <p:nvPicPr>
-          <p:cNvPr id="6" name="삽화:무응답.svg" descr="illust_2712044239156379948_1791736073.png"/>
+          <p:cNvPr id="6" name="삽화:무응답.svg" descr="illust_3573005655495951130_1791736073.png"/>
           <p:cNvPicPr>
             <a:picLocks noChangeAspect="1"/>
           </p:cNvPicPr>
@@ -13069,7 +13069,7 @@
       </p:sp>
       <p:pic>
         <p:nvPicPr>
-          <p:cNvPr id="6" name="삽화:두관문.svg" descr="illust_6076056437377727032_1791736073.png"/>
+          <p:cNvPr id="6" name="삽화:두관문.svg" descr="illust_6456949041481733037_1791736073.png"/>
           <p:cNvPicPr>
             <a:picLocks noChangeAspect="1"/>
           </p:cNvPicPr>
@@ -20997,7 +20997,7 @@
       </p:sp>
       <p:pic>
         <p:nvPicPr>
-          <p:cNvPr id="6" name="삽화:세해석.svg" descr="illust_2500243048225393885_1791736073.png"/>
+          <p:cNvPr id="6" name="삽화:세해석.svg" descr="illust_887364375857495607_1791736073.png"/>
           <p:cNvPicPr>
             <a:picLocks noChangeAspect="1"/>
           </p:cNvPicPr>
@@ -25094,7 +25094,7 @@
       </p:sp>
       <p:pic>
         <p:nvPicPr>
-          <p:cNvPr id="6" name="삽화:명세문서.svg" descr="illust_7937234218740745864_1791736073.png"/>
+          <p:cNvPr id="6" name="삽화:명세문서.svg" descr="illust_2172166047282523513_1791736073.png"/>
           <p:cNvPicPr>
             <a:picLocks noChangeAspect="1"/>
           </p:cNvPicPr>
@@ -25605,7 +25605,7 @@
       </p:sp>
       <p:pic>
         <p:nvPicPr>
-          <p:cNvPr id="6" name="삽화:계약.svg" descr="illust_8476348906330877340_1791736073.png"/>
+          <p:cNvPr id="6" name="삽화:계약.svg" descr="illust_7709957135705690789_1791736073.png"/>
           <p:cNvPicPr>
             <a:picLocks noChangeAspect="1"/>
           </p:cNvPicPr>
@@ -40490,7 +40490,7 @@
       </p:sp>
       <p:pic>
         <p:nvPicPr>
-          <p:cNvPr id="6" name="삽화:갈림.svg" descr="illust_7382178461019301218_1791736073.png"/>
+          <p:cNvPr id="6" name="삽화:갈림.svg" descr="illust_7070719019041641103_1791736073.png"/>
           <p:cNvPicPr>
             <a:picLocks noChangeAspect="1"/>
           </p:cNvPicPr>
@@ -47599,7 +47599,7 @@
       </p:sp>
       <p:pic>
         <p:nvPicPr>
-          <p:cNvPr id="6" name="삽화:세지점.svg" descr="illust_1252805148358494524_1791736073.png"/>
+          <p:cNvPr id="6" name="삽화:세지점.svg" descr="illust_6935437413843182125_1791736073.png"/>
           <p:cNvPicPr>
             <a:picLocks noChangeAspect="1"/>
           </p:cNvPicPr>

--- a/docs/교재/통합반/07일차/통합반_07일차.pptx
+++ b/docs/교재/통합반/07일차/통합반_07일차.pptx
@@ -558,7 +558,7 @@
           <a:lstStyle/>
           <a:p>
             <a:r>
-              <a:t>지난 두 시간에는 에이전트가 일하는 방식과 에이전트에 붙이는 지침과 도구를 다루었습니다. 오늘은 그 에이전트를 믿고 쓰기 위한 두 가지, 곧 사람이 결정하는 자리와 요구사항을 적는 방법을 다룹니다. 이 네 가지를 자료 없이 자신의 말로 설명할 수 있는지가 오늘의 기준입니다.</a:t>
+              <a:t>지난 두 시간에는 에이전트가 일하는 방식과 에이전트에 붙이는 지침과 도구를 다루었습니다. 오늘은 그 에이전트를 믿고 쓰기 위한 두 가지, 곧 사람이 결정하는 자리와 요구사항을 적는 방법을 다룹니다. 수업이 끝났을 때 쿨러 사건의 승인 한 건을 놓고 누가 무엇을 결정했고 무엇이 기록되었는지를 짚을 수 있어야 합니다.</a:t>
             </a:r>
           </a:p>
         </p:txBody>
@@ -1958,7 +1958,7 @@
           <a:lstStyle/>
           <a:p>
             <a:r>
-              <a:t>쿨러 성능 저하 경보 한 건에서 에이전트가 실제로 받은 입력입니다. 앞에서 본 사건과 같은 유형의 다른 경보여서 경보 번호가 다릅니다. 설비, 경보, 사건 번호의 세 항목이며 유온이나 냉각 효율 같은 값은 들어 있지 않습니다. 그런 값은 에이전트가 도구로 읽어 오므로, 입력 계약은 무엇에 대해 일할지만 정합니다.</a:t>
+              <a:t>쿨러 성능 저하 경보 한 건에서 에이전트가 실제로 받은 입력입니다. 같은 종류의 다른 쿨러 성능 저하 경보 한 건의 기록이어서 경보 번호가 앞에서 본 것과 다릅니다. 설비, 경보, 사건 번호의 세 항목이며 유온이나 냉각 효율 같은 값은 들어 있지 않습니다. 그런 값은 에이전트가 도구로 읽어 오므로, 입력 계약은 무엇에 대해 일할지만 정합니다.</a:t>
             </a:r>
           </a:p>
         </p:txBody>
@@ -2098,7 +2098,7 @@
           <a:lstStyle/>
           <a:p>
             <a:r>
-              <a:t>왜 그 13초에 사람이 있어야 하는지를 봅니다. 왼쪽의 조회와 계산은 틀려도 다시 하면 되고 설비는 그대로입니다. 오른쪽의 설비 명령과 작업지시는 실행하는 순간 현장이 달라지고, 그 결과를 책임질 사람이 있어야 합니다. 첫날 HITL이라는 이름으로 소개한 구조가 이 경계를 정해 둔 것입니다.</a:t>
+              <a:t>왜 그 13초에 사람이 있어야 하는지를 봅니다. 왼쪽의 조회와 계산은 틀려도 다시 하면 되고 설비는 그대로입니다. 오른쪽의 설비 명령과 작업지시는 실행하는 순간 현장이 달라지고, 그 결과를 책임질 사람이 있어야 합니다. 1일차에 HITL이라는 이름으로 소개한 구조가 이 경계를 정해 둔 것입니다.</a:t>
             </a:r>
           </a:p>
         </p:txBody>
@@ -2868,7 +2868,7 @@
           <a:lstStyle/>
           <a:p>
             <a:r>
-              <a:t>사람이 끼어드는 자리는 승인 하나만이 아닙니다. 위의 띠는 처리의 구간이고, 아래의 세 장면은 사람이 개입하는 자리입니다. 왼쪽 둘은 에이전트가 일하는 동안에 생깁니다. 에이전트가 필요한 정보가 없어 묻는 경우와, 한도를 넘겨 멈춘 작업을 사람이 닫는 경우입니다. 오른쪽은 추천안이 나온 뒤 실행하기 전에 담당자가 승인하거나 거절하는 단계입니다.</a:t>
+              <a:t>사람이 끼어드는 자리는 승인 하나만이 아닙니다. 위의 띠는 처리의 구간이고, 아래의 세 장면은 사람이 개입하는 자리입니다. 왼쪽 둘은 에이전트가 일하는 동안에 생깁니다. 에이전트가 필요한 정보가 없어 묻는 경우와, 실행 시간이나 형식 교정 횟수의 한도를 넘겨 멈춘 작업을 사람이 닫는 경우입니다. 오른쪽은 추천안이 나온 뒤 실행하기 전에 담당자가 승인하거나 거절하는 단계입니다.</a:t>
             </a:r>
           </a:p>
         </p:txBody>
@@ -3148,7 +3148,7 @@
           <a:lstStyle/>
           <a:p>
             <a:r>
-              <a:t>뜻은 앞에서 풀었으므로 여기서는 이름과 자리만 확인합니다. 이 다섯과 함께 승인 역할, 결정 기록, 에이전트의 질문, 금지 조건이 오늘의 용어입니다. 하나를 골라 자료를 덮고 자신의 문장으로 써 보시기 바랍니다.</a:t>
+              <a:t>뜻은 앞에서 풀었으므로 여기서는 이름과 자리만 확인합니다. 이 다섯과 함께 승인 역할, 결정 기록, 에이전트의 질문, 금지 조건이 오늘의 용어입니다. 오른쪽 칸을 가리고 용어마다 쿨러 사건에서의 자리를 말해 보시기 바랍니다.</a:t>
             </a:r>
           </a:p>
         </p:txBody>
@@ -3428,7 +3428,7 @@
           <a:lstStyle/>
           <a:p>
             <a:r>
-              <a:t>정답보다 판단 기준이 중요합니다. 첫 문항의 3번은 두 번 확인했다는 점에서 그럴듯하지만, 두 확인 모두 실행의 결정은 아닙니다. 둘째 문항의 2번은 답변을 승인으로 바꾸어 쓴 것이고, 4번은 시스템만 적는 기록을 에이전트가 채운 것입니다. 셋째 문항의 1번은 얼마나 빨라야 하는지가 적혀 있지 않아 판정할 수 없습니다.</a:t>
+              <a:t>문항마다 가장 그럴듯한 오답부터 짚습니다. 첫 문항의 3번은 두 번 확인했다는 점에서 그럴듯하지만, 두 확인 모두 실행의 결정은 아닙니다. 둘째 문항의 2번은 답변을 승인으로 바꾸어 쓴 것이고, 4번은 시스템만 적는 기록을 에이전트가 채운 것입니다. 셋째 문항의 1번은 얼마나 빨라야 하는지가 적혀 있지 않아 판정할 수 없습니다.</a:t>
             </a:r>
           </a:p>
         </p:txBody>
@@ -3708,7 +3708,7 @@
           <a:lstStyle/>
           <a:p>
             <a:r>
-              <a:t>승인도 거절도 하지 않는 경우가 있습니다. 승인 요청이 올라온 뒤 10분 동안 응답이 없으면 승인 지연 알림이 나갑니다. 알림의 문구는 「승인 대기 중, 승인하거나 거절할 때까지 기다립니다」입니다. 알림이 나가도 승인 작업은 닫히지 않으며, 시스템이 대신 승인하거나 거절하지도 않습니다. 담당자가 뒤늦게 승인하면 정상으로 처리됩니다.</a:t>
+              <a:t>승인도 거절도 하지 않는 경우가 있습니다. 승인 요청이 올라온 뒤 기한인 10분이 지나도록 응답이 없으면 승인 지연 알림이 나갑니다. 알림의 문구는 「승인 대기 중, 승인하거나 거절할 때까지 기다립니다」입니다. 알림이 나가도 승인 작업은 닫히지 않으며, 시스템이 대신 승인하거나 거절하지도 않습니다. 담당자가 뒤늦게 승인하면 정상으로 처리됩니다.</a:t>
             </a:r>
           </a:p>
         </p:txBody>
@@ -8376,7 +8376,7 @@
       </p:sp>
       <p:pic>
         <p:nvPicPr>
-          <p:cNvPr id="6" name="삽화:무응답.svg" descr="illust_3573005655495951130_1791736073.png"/>
+          <p:cNvPr id="6" name="삽화:무응답.svg" descr="illust_3114721385458505376_1791736073.png"/>
           <p:cNvPicPr>
             <a:picLocks noChangeAspect="1"/>
           </p:cNvPicPr>
@@ -13069,7 +13069,7 @@
       </p:sp>
       <p:pic>
         <p:nvPicPr>
-          <p:cNvPr id="6" name="삽화:두관문.svg" descr="illust_6456949041481733037_1791736073.png"/>
+          <p:cNvPr id="6" name="삽화:두관문.svg" descr="illust_806941289224747713_1791736073.png"/>
           <p:cNvPicPr>
             <a:picLocks noChangeAspect="1"/>
           </p:cNvPicPr>
@@ -17287,7 +17287,7 @@
                 <a:ea typeface="맑은 고딕"/>
                 <a:cs typeface="맑은 고딕"/>
               </a:rPr>
-              <a:t>이 실습을 마치면 빠진 정보를 묻는 확인 질문과, 추가 입력을 받아 다시 판단한 결과와, 그 전후의 상태 기록이 남는다.</a:t>
+              <a:t>빠진 정보를 확정하지 않고 확인 질문을 내게 고친 뒤, 추가 입력을 받아 다시 판단한 결과와 전후 상태를 남긴다.</a:t>
             </a:r>
           </a:p>
         </p:txBody>
@@ -20997,7 +20997,7 @@
       </p:sp>
       <p:pic>
         <p:nvPicPr>
-          <p:cNvPr id="6" name="삽화:세해석.svg" descr="illust_887364375857495607_1791736073.png"/>
+          <p:cNvPr id="6" name="삽화:세해석.svg" descr="illust_4076930983755420968_1791736073.png"/>
           <p:cNvPicPr>
             <a:picLocks noChangeAspect="1"/>
           </p:cNvPicPr>
@@ -25094,7 +25094,7 @@
       </p:sp>
       <p:pic>
         <p:nvPicPr>
-          <p:cNvPr id="6" name="삽화:명세문서.svg" descr="illust_2172166047282523513_1791736073.png"/>
+          <p:cNvPr id="6" name="삽화:명세문서.svg" descr="illust_7355278937091307748_1791736073.png"/>
           <p:cNvPicPr>
             <a:picLocks noChangeAspect="1"/>
           </p:cNvPicPr>
@@ -25605,7 +25605,7 @@
       </p:sp>
       <p:pic>
         <p:nvPicPr>
-          <p:cNvPr id="6" name="삽화:계약.svg" descr="illust_7709957135705690789_1791736073.png"/>
+          <p:cNvPr id="6" name="삽화:계약.svg" descr="illust_260291388151688893_1791736073.png"/>
           <p:cNvPicPr>
             <a:picLocks noChangeAspect="1"/>
           </p:cNvPicPr>
@@ -39564,7 +39564,7 @@
                 <a:ea typeface="맑은 고딕"/>
                 <a:cs typeface="맑은 고딕"/>
               </a:rPr>
-              <a:t>이 실습을 마치면 모호한 요청으로 고친 버전과 고치기 전 버전의 출력을 같은 요청으로 견준 비교가 남는다.</a:t>
+              <a:t>긴급 정비 조건을 모호한 요청으로 더한 버전과 고치기 전 버전의 출력을 같은 요청으로 견준다.</a:t>
             </a:r>
           </a:p>
         </p:txBody>
@@ -40490,7 +40490,7 @@
       </p:sp>
       <p:pic>
         <p:nvPicPr>
-          <p:cNvPr id="6" name="삽화:갈림.svg" descr="illust_7070719019041641103_1791736073.png"/>
+          <p:cNvPr id="6" name="삽화:갈림.svg" descr="illust_6556728027256782803_1791736073.png"/>
           <p:cNvPicPr>
             <a:picLocks noChangeAspect="1"/>
           </p:cNvPicPr>
@@ -47599,7 +47599,7 @@
       </p:sp>
       <p:pic>
         <p:nvPicPr>
-          <p:cNvPr id="6" name="삽화:세지점.svg" descr="illust_6935437413843182125_1791736073.png"/>
+          <p:cNvPr id="6" name="삽화:세지점.svg" descr="illust_5518303568405608056_1791736073.png"/>
           <p:cNvPicPr>
             <a:picLocks noChangeAspect="1"/>
           </p:cNvPicPr>

--- a/docs/교재/통합반/07일차/통합반_07일차.pptx
+++ b/docs/교재/통합반/07일차/통합반_07일차.pptx
@@ -8376,7 +8376,7 @@
       </p:sp>
       <p:pic>
         <p:nvPicPr>
-          <p:cNvPr id="6" name="삽화:무응답.svg" descr="illust_3114721385458505376_1791736073.png"/>
+          <p:cNvPr id="6" name="삽화:무응답.svg" descr="illust_2453887490425308060_1791736073.png"/>
           <p:cNvPicPr>
             <a:picLocks noChangeAspect="1"/>
           </p:cNvPicPr>
@@ -13069,7 +13069,7 @@
       </p:sp>
       <p:pic>
         <p:nvPicPr>
-          <p:cNvPr id="6" name="삽화:두관문.svg" descr="illust_806941289224747713_1791736073.png"/>
+          <p:cNvPr id="6" name="삽화:두관문.svg" descr="illust_1405997736482503893_1791736073.png"/>
           <p:cNvPicPr>
             <a:picLocks noChangeAspect="1"/>
           </p:cNvPicPr>
@@ -20997,7 +20997,7 @@
       </p:sp>
       <p:pic>
         <p:nvPicPr>
-          <p:cNvPr id="6" name="삽화:세해석.svg" descr="illust_4076930983755420968_1791736073.png"/>
+          <p:cNvPr id="6" name="삽화:세해석.svg" descr="illust_3721855515909614513_1791736073.png"/>
           <p:cNvPicPr>
             <a:picLocks noChangeAspect="1"/>
           </p:cNvPicPr>
@@ -25094,7 +25094,7 @@
       </p:sp>
       <p:pic>
         <p:nvPicPr>
-          <p:cNvPr id="6" name="삽화:명세문서.svg" descr="illust_7355278937091307748_1791736073.png"/>
+          <p:cNvPr id="6" name="삽화:명세문서.svg" descr="illust_6358147664219337040_1791736073.png"/>
           <p:cNvPicPr>
             <a:picLocks noChangeAspect="1"/>
           </p:cNvPicPr>
@@ -25605,7 +25605,7 @@
       </p:sp>
       <p:pic>
         <p:nvPicPr>
-          <p:cNvPr id="6" name="삽화:계약.svg" descr="illust_260291388151688893_1791736073.png"/>
+          <p:cNvPr id="6" name="삽화:계약.svg" descr="illust_501803041351336760_1791736073.png"/>
           <p:cNvPicPr>
             <a:picLocks noChangeAspect="1"/>
           </p:cNvPicPr>
@@ -40490,7 +40490,7 @@
       </p:sp>
       <p:pic>
         <p:nvPicPr>
-          <p:cNvPr id="6" name="삽화:갈림.svg" descr="illust_6556728027256782803_1791736073.png"/>
+          <p:cNvPr id="6" name="삽화:갈림.svg" descr="illust_803403054518386508_1791736073.png"/>
           <p:cNvPicPr>
             <a:picLocks noChangeAspect="1"/>
           </p:cNvPicPr>
@@ -43478,7 +43478,7 @@
                 <a:ea typeface="맑은 고딕"/>
                 <a:cs typeface="맑은 고딕"/>
               </a:rPr>
-              <a:t>배운 내용을 바탕으로 정답을 맞춰보세요.</a:t>
+              <a:t>배운 내용을 바탕으로 정답을 맞혀 보세요.</a:t>
             </a:r>
           </a:p>
         </p:txBody>
@@ -47599,7 +47599,7 @@
       </p:sp>
       <p:pic>
         <p:nvPicPr>
-          <p:cNvPr id="6" name="삽화:세지점.svg" descr="illust_5518303568405608056_1791736073.png"/>
+          <p:cNvPr id="6" name="삽화:세지점.svg" descr="illust_1195075965879888136_1791736073.png"/>
           <p:cNvPicPr>
             <a:picLocks noChangeAspect="1"/>
           </p:cNvPicPr>
